--- a/assets/slides_mlg_postech.pptx
+++ b/assets/slides_mlg_postech.pptx
@@ -104,6 +104,11 @@
       </a:defRPr>
     </a:lvl9pPr>
   </p:defaultTextStyle>
+  <p:extLst>
+    <p:ext uri="{EFAFB233-063F-42B5-8137-9DF3F51BA10A}">
+      <p15:sldGuideLst xmlns:p15="http://schemas.microsoft.com/office/powerpoint/2012/main"/>
+    </p:ext>
+  </p:extLst>
 </p:presentation>
 </file>
 
@@ -240,7 +245,7 @@
           <a:p>
             <a:fld id="{608D1F3B-488F-7E48-86D2-E03BC21833E8}" type="datetimeFigureOut">
               <a:rPr lang="en-US" smtClean="0"/>
-              <a:t>5/22/18</a:t>
+              <a:t>8/2/18</a:t>
             </a:fld>
             <a:endParaRPr lang="en-US"/>
           </a:p>
@@ -292,356 +297,6 @@
     <p:extLst>
       <p:ext uri="{BB962C8B-B14F-4D97-AF65-F5344CB8AC3E}">
         <p14:creationId xmlns:p14="http://schemas.microsoft.com/office/powerpoint/2010/main" val="1381240774"/>
-      </p:ext>
-    </p:extLst>
-  </p:cSld>
-  <p:clrMapOvr>
-    <a:masterClrMapping/>
-  </p:clrMapOvr>
-</p:sldLayout>
-</file>
-
-<file path=ppt/slideLayouts/slideLayout10.xml><?xml version="1.0" encoding="utf-8"?>
-<p:sldLayout xmlns:a="http://schemas.openxmlformats.org/drawingml/2006/main" xmlns:r="http://schemas.openxmlformats.org/officeDocument/2006/relationships" xmlns:p="http://schemas.openxmlformats.org/presentationml/2006/main" type="vertTx" preserve="1">
-  <p:cSld name="Title and Vertical Text">
-    <p:spTree>
-      <p:nvGrpSpPr>
-        <p:cNvPr id="1" name=""/>
-        <p:cNvGrpSpPr/>
-        <p:nvPr/>
-      </p:nvGrpSpPr>
-      <p:grpSpPr>
-        <a:xfrm>
-          <a:off x="0" y="0"/>
-          <a:ext cx="0" cy="0"/>
-          <a:chOff x="0" y="0"/>
-          <a:chExt cx="0" cy="0"/>
-        </a:xfrm>
-      </p:grpSpPr>
-      <p:sp>
-        <p:nvSpPr>
-          <p:cNvPr id="2" name="Title 1"/>
-          <p:cNvSpPr>
-            <a:spLocks noGrp="1"/>
-          </p:cNvSpPr>
-          <p:nvPr>
-            <p:ph type="title"/>
-          </p:nvPr>
-        </p:nvSpPr>
-        <p:spPr/>
-        <p:txBody>
-          <a:bodyPr/>
-          <a:lstStyle/>
-          <a:p>
-            <a:r>
-              <a:rPr lang="en-US" smtClean="0"/>
-              <a:t>Click to edit Master title style</a:t>
-            </a:r>
-            <a:endParaRPr lang="en-US"/>
-          </a:p>
-        </p:txBody>
-      </p:sp>
-      <p:sp>
-        <p:nvSpPr>
-          <p:cNvPr id="3" name="Vertical Text Placeholder 2"/>
-          <p:cNvSpPr>
-            <a:spLocks noGrp="1"/>
-          </p:cNvSpPr>
-          <p:nvPr>
-            <p:ph type="body" orient="vert" idx="1"/>
-          </p:nvPr>
-        </p:nvSpPr>
-        <p:spPr/>
-        <p:txBody>
-          <a:bodyPr vert="eaVert"/>
-          <a:lstStyle/>
-          <a:p>
-            <a:pPr lvl="0"/>
-            <a:r>
-              <a:rPr lang="en-US" smtClean="0"/>
-              <a:t>Click to edit Master text styles</a:t>
-            </a:r>
-          </a:p>
-          <a:p>
-            <a:pPr lvl="1"/>
-            <a:r>
-              <a:rPr lang="en-US" smtClean="0"/>
-              <a:t>Second level</a:t>
-            </a:r>
-          </a:p>
-          <a:p>
-            <a:pPr lvl="2"/>
-            <a:r>
-              <a:rPr lang="en-US" smtClean="0"/>
-              <a:t>Third level</a:t>
-            </a:r>
-          </a:p>
-          <a:p>
-            <a:pPr lvl="3"/>
-            <a:r>
-              <a:rPr lang="en-US" smtClean="0"/>
-              <a:t>Fourth level</a:t>
-            </a:r>
-          </a:p>
-          <a:p>
-            <a:pPr lvl="4"/>
-            <a:r>
-              <a:rPr lang="en-US" smtClean="0"/>
-              <a:t>Fifth level</a:t>
-            </a:r>
-            <a:endParaRPr lang="en-US"/>
-          </a:p>
-        </p:txBody>
-      </p:sp>
-      <p:sp>
-        <p:nvSpPr>
-          <p:cNvPr id="4" name="Date Placeholder 3"/>
-          <p:cNvSpPr>
-            <a:spLocks noGrp="1"/>
-          </p:cNvSpPr>
-          <p:nvPr>
-            <p:ph type="dt" sz="half" idx="10"/>
-          </p:nvPr>
-        </p:nvSpPr>
-        <p:spPr/>
-        <p:txBody>
-          <a:bodyPr/>
-          <a:lstStyle/>
-          <a:p>
-            <a:fld id="{608D1F3B-488F-7E48-86D2-E03BC21833E8}" type="datetimeFigureOut">
-              <a:rPr lang="en-US" smtClean="0"/>
-              <a:t>5/22/18</a:t>
-            </a:fld>
-            <a:endParaRPr lang="en-US"/>
-          </a:p>
-        </p:txBody>
-      </p:sp>
-      <p:sp>
-        <p:nvSpPr>
-          <p:cNvPr id="5" name="Footer Placeholder 4"/>
-          <p:cNvSpPr>
-            <a:spLocks noGrp="1"/>
-          </p:cNvSpPr>
-          <p:nvPr>
-            <p:ph type="ftr" sz="quarter" idx="11"/>
-          </p:nvPr>
-        </p:nvSpPr>
-        <p:spPr/>
-        <p:txBody>
-          <a:bodyPr/>
-          <a:lstStyle/>
-          <a:p>
-            <a:endParaRPr lang="en-US"/>
-          </a:p>
-        </p:txBody>
-      </p:sp>
-      <p:sp>
-        <p:nvSpPr>
-          <p:cNvPr id="6" name="Slide Number Placeholder 5"/>
-          <p:cNvSpPr>
-            <a:spLocks noGrp="1"/>
-          </p:cNvSpPr>
-          <p:nvPr>
-            <p:ph type="sldNum" sz="quarter" idx="12"/>
-          </p:nvPr>
-        </p:nvSpPr>
-        <p:spPr/>
-        <p:txBody>
-          <a:bodyPr/>
-          <a:lstStyle/>
-          <a:p>
-            <a:fld id="{9EA1FB67-A041-DA40-91B6-11F765EC9F75}" type="slidenum">
-              <a:rPr lang="en-US" smtClean="0"/>
-              <a:t>‹#›</a:t>
-            </a:fld>
-            <a:endParaRPr lang="en-US"/>
-          </a:p>
-        </p:txBody>
-      </p:sp>
-    </p:spTree>
-    <p:extLst>
-      <p:ext uri="{BB962C8B-B14F-4D97-AF65-F5344CB8AC3E}">
-        <p14:creationId xmlns:p14="http://schemas.microsoft.com/office/powerpoint/2010/main" val="801398631"/>
-      </p:ext>
-    </p:extLst>
-  </p:cSld>
-  <p:clrMapOvr>
-    <a:masterClrMapping/>
-  </p:clrMapOvr>
-</p:sldLayout>
-</file>
-
-<file path=ppt/slideLayouts/slideLayout11.xml><?xml version="1.0" encoding="utf-8"?>
-<p:sldLayout xmlns:a="http://schemas.openxmlformats.org/drawingml/2006/main" xmlns:r="http://schemas.openxmlformats.org/officeDocument/2006/relationships" xmlns:p="http://schemas.openxmlformats.org/presentationml/2006/main" type="vertTitleAndTx" preserve="1">
-  <p:cSld name="Vertical Title and Text">
-    <p:spTree>
-      <p:nvGrpSpPr>
-        <p:cNvPr id="1" name=""/>
-        <p:cNvGrpSpPr/>
-        <p:nvPr/>
-      </p:nvGrpSpPr>
-      <p:grpSpPr>
-        <a:xfrm>
-          <a:off x="0" y="0"/>
-          <a:ext cx="0" cy="0"/>
-          <a:chOff x="0" y="0"/>
-          <a:chExt cx="0" cy="0"/>
-        </a:xfrm>
-      </p:grpSpPr>
-      <p:sp>
-        <p:nvSpPr>
-          <p:cNvPr id="2" name="Vertical Title 1"/>
-          <p:cNvSpPr>
-            <a:spLocks noGrp="1"/>
-          </p:cNvSpPr>
-          <p:nvPr>
-            <p:ph type="title" orient="vert"/>
-          </p:nvPr>
-        </p:nvSpPr>
-        <p:spPr>
-          <a:xfrm>
-            <a:off x="8724900" y="365125"/>
-            <a:ext cx="2628900" cy="5811838"/>
-          </a:xfrm>
-        </p:spPr>
-        <p:txBody>
-          <a:bodyPr vert="eaVert"/>
-          <a:lstStyle/>
-          <a:p>
-            <a:r>
-              <a:rPr lang="en-US" smtClean="0"/>
-              <a:t>Click to edit Master title style</a:t>
-            </a:r>
-            <a:endParaRPr lang="en-US"/>
-          </a:p>
-        </p:txBody>
-      </p:sp>
-      <p:sp>
-        <p:nvSpPr>
-          <p:cNvPr id="3" name="Vertical Text Placeholder 2"/>
-          <p:cNvSpPr>
-            <a:spLocks noGrp="1"/>
-          </p:cNvSpPr>
-          <p:nvPr>
-            <p:ph type="body" orient="vert" idx="1"/>
-          </p:nvPr>
-        </p:nvSpPr>
-        <p:spPr>
-          <a:xfrm>
-            <a:off x="838200" y="365125"/>
-            <a:ext cx="7734300" cy="5811838"/>
-          </a:xfrm>
-        </p:spPr>
-        <p:txBody>
-          <a:bodyPr vert="eaVert"/>
-          <a:lstStyle/>
-          <a:p>
-            <a:pPr lvl="0"/>
-            <a:r>
-              <a:rPr lang="en-US" smtClean="0"/>
-              <a:t>Click to edit Master text styles</a:t>
-            </a:r>
-          </a:p>
-          <a:p>
-            <a:pPr lvl="1"/>
-            <a:r>
-              <a:rPr lang="en-US" smtClean="0"/>
-              <a:t>Second level</a:t>
-            </a:r>
-          </a:p>
-          <a:p>
-            <a:pPr lvl="2"/>
-            <a:r>
-              <a:rPr lang="en-US" smtClean="0"/>
-              <a:t>Third level</a:t>
-            </a:r>
-          </a:p>
-          <a:p>
-            <a:pPr lvl="3"/>
-            <a:r>
-              <a:rPr lang="en-US" smtClean="0"/>
-              <a:t>Fourth level</a:t>
-            </a:r>
-          </a:p>
-          <a:p>
-            <a:pPr lvl="4"/>
-            <a:r>
-              <a:rPr lang="en-US" smtClean="0"/>
-              <a:t>Fifth level</a:t>
-            </a:r>
-            <a:endParaRPr lang="en-US"/>
-          </a:p>
-        </p:txBody>
-      </p:sp>
-      <p:sp>
-        <p:nvSpPr>
-          <p:cNvPr id="4" name="Date Placeholder 3"/>
-          <p:cNvSpPr>
-            <a:spLocks noGrp="1"/>
-          </p:cNvSpPr>
-          <p:nvPr>
-            <p:ph type="dt" sz="half" idx="10"/>
-          </p:nvPr>
-        </p:nvSpPr>
-        <p:spPr/>
-        <p:txBody>
-          <a:bodyPr/>
-          <a:lstStyle/>
-          <a:p>
-            <a:fld id="{608D1F3B-488F-7E48-86D2-E03BC21833E8}" type="datetimeFigureOut">
-              <a:rPr lang="en-US" smtClean="0"/>
-              <a:t>5/22/18</a:t>
-            </a:fld>
-            <a:endParaRPr lang="en-US"/>
-          </a:p>
-        </p:txBody>
-      </p:sp>
-      <p:sp>
-        <p:nvSpPr>
-          <p:cNvPr id="5" name="Footer Placeholder 4"/>
-          <p:cNvSpPr>
-            <a:spLocks noGrp="1"/>
-          </p:cNvSpPr>
-          <p:nvPr>
-            <p:ph type="ftr" sz="quarter" idx="11"/>
-          </p:nvPr>
-        </p:nvSpPr>
-        <p:spPr/>
-        <p:txBody>
-          <a:bodyPr/>
-          <a:lstStyle/>
-          <a:p>
-            <a:endParaRPr lang="en-US"/>
-          </a:p>
-        </p:txBody>
-      </p:sp>
-      <p:sp>
-        <p:nvSpPr>
-          <p:cNvPr id="6" name="Slide Number Placeholder 5"/>
-          <p:cNvSpPr>
-            <a:spLocks noGrp="1"/>
-          </p:cNvSpPr>
-          <p:nvPr>
-            <p:ph type="sldNum" sz="quarter" idx="12"/>
-          </p:nvPr>
-        </p:nvSpPr>
-        <p:spPr/>
-        <p:txBody>
-          <a:bodyPr/>
-          <a:lstStyle/>
-          <a:p>
-            <a:fld id="{9EA1FB67-A041-DA40-91B6-11F765EC9F75}" type="slidenum">
-              <a:rPr lang="en-US" smtClean="0"/>
-              <a:t>‹#›</a:t>
-            </a:fld>
-            <a:endParaRPr lang="en-US"/>
-          </a:p>
-        </p:txBody>
-      </p:sp>
-    </p:spTree>
-    <p:extLst>
-      <p:ext uri="{BB962C8B-B14F-4D97-AF65-F5344CB8AC3E}">
-        <p14:creationId xmlns:p14="http://schemas.microsoft.com/office/powerpoint/2010/main" val="89357233"/>
       </p:ext>
     </p:extLst>
   </p:cSld>
@@ -681,7 +336,15 @@
         <p:spPr/>
         <p:txBody>
           <a:bodyPr/>
-          <a:lstStyle/>
+          <a:lstStyle>
+            <a:lvl1pPr>
+              <a:defRPr>
+                <a:solidFill>
+                  <a:schemeClr val="bg1"/>
+                </a:solidFill>
+              </a:defRPr>
+            </a:lvl1pPr>
+          </a:lstStyle>
           <a:p>
             <a:r>
               <a:rPr lang="en-US" smtClean="0"/>
@@ -760,7 +423,7 @@
           <a:p>
             <a:fld id="{608D1F3B-488F-7E48-86D2-E03BC21833E8}" type="datetimeFigureOut">
               <a:rPr lang="en-US" smtClean="0"/>
-              <a:t>5/22/18</a:t>
+              <a:t>8/2/18</a:t>
             </a:fld>
             <a:endParaRPr lang="en-US"/>
           </a:p>
@@ -1008,7 +671,7 @@
           <a:p>
             <a:fld id="{608D1F3B-488F-7E48-86D2-E03BC21833E8}" type="datetimeFigureOut">
               <a:rPr lang="en-US" smtClean="0"/>
-              <a:t>5/22/18</a:t>
+              <a:t>8/2/18</a:t>
             </a:fld>
             <a:endParaRPr lang="en-US"/>
           </a:p>
@@ -1099,7 +762,15 @@
         <p:spPr/>
         <p:txBody>
           <a:bodyPr/>
-          <a:lstStyle/>
+          <a:lstStyle>
+            <a:lvl1pPr>
+              <a:defRPr>
+                <a:solidFill>
+                  <a:schemeClr val="bg1"/>
+                </a:solidFill>
+              </a:defRPr>
+            </a:lvl1pPr>
+          </a:lstStyle>
           <a:p>
             <a:r>
               <a:rPr lang="en-US" smtClean="0"/>
@@ -1240,7 +911,7 @@
           <a:p>
             <a:fld id="{608D1F3B-488F-7E48-86D2-E03BC21833E8}" type="datetimeFigureOut">
               <a:rPr lang="en-US" smtClean="0"/>
-              <a:t>5/22/18</a:t>
+              <a:t>8/2/18</a:t>
             </a:fld>
             <a:endParaRPr lang="en-US"/>
           </a:p>
@@ -1302,373 +973,6 @@
 </file>
 
 <file path=ppt/slideLayouts/slideLayout5.xml><?xml version="1.0" encoding="utf-8"?>
-<p:sldLayout xmlns:a="http://schemas.openxmlformats.org/drawingml/2006/main" xmlns:r="http://schemas.openxmlformats.org/officeDocument/2006/relationships" xmlns:p="http://schemas.openxmlformats.org/presentationml/2006/main" type="twoTxTwoObj" preserve="1">
-  <p:cSld name="Comparison">
-    <p:spTree>
-      <p:nvGrpSpPr>
-        <p:cNvPr id="1" name=""/>
-        <p:cNvGrpSpPr/>
-        <p:nvPr/>
-      </p:nvGrpSpPr>
-      <p:grpSpPr>
-        <a:xfrm>
-          <a:off x="0" y="0"/>
-          <a:ext cx="0" cy="0"/>
-          <a:chOff x="0" y="0"/>
-          <a:chExt cx="0" cy="0"/>
-        </a:xfrm>
-      </p:grpSpPr>
-      <p:sp>
-        <p:nvSpPr>
-          <p:cNvPr id="2" name="Title 1"/>
-          <p:cNvSpPr>
-            <a:spLocks noGrp="1"/>
-          </p:cNvSpPr>
-          <p:nvPr>
-            <p:ph type="title"/>
-          </p:nvPr>
-        </p:nvSpPr>
-        <p:spPr>
-          <a:xfrm>
-            <a:off x="839788" y="365125"/>
-            <a:ext cx="10515600" cy="1325563"/>
-          </a:xfrm>
-        </p:spPr>
-        <p:txBody>
-          <a:bodyPr/>
-          <a:lstStyle/>
-          <a:p>
-            <a:r>
-              <a:rPr lang="en-US" smtClean="0"/>
-              <a:t>Click to edit Master title style</a:t>
-            </a:r>
-            <a:endParaRPr lang="en-US"/>
-          </a:p>
-        </p:txBody>
-      </p:sp>
-      <p:sp>
-        <p:nvSpPr>
-          <p:cNvPr id="3" name="Text Placeholder 2"/>
-          <p:cNvSpPr>
-            <a:spLocks noGrp="1"/>
-          </p:cNvSpPr>
-          <p:nvPr>
-            <p:ph type="body" idx="1"/>
-          </p:nvPr>
-        </p:nvSpPr>
-        <p:spPr>
-          <a:xfrm>
-            <a:off x="839788" y="1681163"/>
-            <a:ext cx="5157787" cy="823912"/>
-          </a:xfrm>
-        </p:spPr>
-        <p:txBody>
-          <a:bodyPr anchor="b"/>
-          <a:lstStyle>
-            <a:lvl1pPr marL="0" indent="0">
-              <a:buNone/>
-              <a:defRPr sz="2400" b="1"/>
-            </a:lvl1pPr>
-            <a:lvl2pPr marL="457200" indent="0">
-              <a:buNone/>
-              <a:defRPr sz="2000" b="1"/>
-            </a:lvl2pPr>
-            <a:lvl3pPr marL="914400" indent="0">
-              <a:buNone/>
-              <a:defRPr sz="1800" b="1"/>
-            </a:lvl3pPr>
-            <a:lvl4pPr marL="1371600" indent="0">
-              <a:buNone/>
-              <a:defRPr sz="1600" b="1"/>
-            </a:lvl4pPr>
-            <a:lvl5pPr marL="1828800" indent="0">
-              <a:buNone/>
-              <a:defRPr sz="1600" b="1"/>
-            </a:lvl5pPr>
-            <a:lvl6pPr marL="2286000" indent="0">
-              <a:buNone/>
-              <a:defRPr sz="1600" b="1"/>
-            </a:lvl6pPr>
-            <a:lvl7pPr marL="2743200" indent="0">
-              <a:buNone/>
-              <a:defRPr sz="1600" b="1"/>
-            </a:lvl7pPr>
-            <a:lvl8pPr marL="3200400" indent="0">
-              <a:buNone/>
-              <a:defRPr sz="1600" b="1"/>
-            </a:lvl8pPr>
-            <a:lvl9pPr marL="3657600" indent="0">
-              <a:buNone/>
-              <a:defRPr sz="1600" b="1"/>
-            </a:lvl9pPr>
-          </a:lstStyle>
-          <a:p>
-            <a:pPr lvl="0"/>
-            <a:r>
-              <a:rPr lang="en-US" smtClean="0"/>
-              <a:t>Click to edit Master text styles</a:t>
-            </a:r>
-          </a:p>
-        </p:txBody>
-      </p:sp>
-      <p:sp>
-        <p:nvSpPr>
-          <p:cNvPr id="4" name="Content Placeholder 3"/>
-          <p:cNvSpPr>
-            <a:spLocks noGrp="1"/>
-          </p:cNvSpPr>
-          <p:nvPr>
-            <p:ph sz="half" idx="2"/>
-          </p:nvPr>
-        </p:nvSpPr>
-        <p:spPr>
-          <a:xfrm>
-            <a:off x="839788" y="2505075"/>
-            <a:ext cx="5157787" cy="3684588"/>
-          </a:xfrm>
-        </p:spPr>
-        <p:txBody>
-          <a:bodyPr/>
-          <a:lstStyle/>
-          <a:p>
-            <a:pPr lvl="0"/>
-            <a:r>
-              <a:rPr lang="en-US" smtClean="0"/>
-              <a:t>Click to edit Master text styles</a:t>
-            </a:r>
-          </a:p>
-          <a:p>
-            <a:pPr lvl="1"/>
-            <a:r>
-              <a:rPr lang="en-US" smtClean="0"/>
-              <a:t>Second level</a:t>
-            </a:r>
-          </a:p>
-          <a:p>
-            <a:pPr lvl="2"/>
-            <a:r>
-              <a:rPr lang="en-US" smtClean="0"/>
-              <a:t>Third level</a:t>
-            </a:r>
-          </a:p>
-          <a:p>
-            <a:pPr lvl="3"/>
-            <a:r>
-              <a:rPr lang="en-US" smtClean="0"/>
-              <a:t>Fourth level</a:t>
-            </a:r>
-          </a:p>
-          <a:p>
-            <a:pPr lvl="4"/>
-            <a:r>
-              <a:rPr lang="en-US" smtClean="0"/>
-              <a:t>Fifth level</a:t>
-            </a:r>
-            <a:endParaRPr lang="en-US"/>
-          </a:p>
-        </p:txBody>
-      </p:sp>
-      <p:sp>
-        <p:nvSpPr>
-          <p:cNvPr id="5" name="Text Placeholder 4"/>
-          <p:cNvSpPr>
-            <a:spLocks noGrp="1"/>
-          </p:cNvSpPr>
-          <p:nvPr>
-            <p:ph type="body" sz="quarter" idx="3"/>
-          </p:nvPr>
-        </p:nvSpPr>
-        <p:spPr>
-          <a:xfrm>
-            <a:off x="6172200" y="1681163"/>
-            <a:ext cx="5183188" cy="823912"/>
-          </a:xfrm>
-        </p:spPr>
-        <p:txBody>
-          <a:bodyPr anchor="b"/>
-          <a:lstStyle>
-            <a:lvl1pPr marL="0" indent="0">
-              <a:buNone/>
-              <a:defRPr sz="2400" b="1"/>
-            </a:lvl1pPr>
-            <a:lvl2pPr marL="457200" indent="0">
-              <a:buNone/>
-              <a:defRPr sz="2000" b="1"/>
-            </a:lvl2pPr>
-            <a:lvl3pPr marL="914400" indent="0">
-              <a:buNone/>
-              <a:defRPr sz="1800" b="1"/>
-            </a:lvl3pPr>
-            <a:lvl4pPr marL="1371600" indent="0">
-              <a:buNone/>
-              <a:defRPr sz="1600" b="1"/>
-            </a:lvl4pPr>
-            <a:lvl5pPr marL="1828800" indent="0">
-              <a:buNone/>
-              <a:defRPr sz="1600" b="1"/>
-            </a:lvl5pPr>
-            <a:lvl6pPr marL="2286000" indent="0">
-              <a:buNone/>
-              <a:defRPr sz="1600" b="1"/>
-            </a:lvl6pPr>
-            <a:lvl7pPr marL="2743200" indent="0">
-              <a:buNone/>
-              <a:defRPr sz="1600" b="1"/>
-            </a:lvl7pPr>
-            <a:lvl8pPr marL="3200400" indent="0">
-              <a:buNone/>
-              <a:defRPr sz="1600" b="1"/>
-            </a:lvl8pPr>
-            <a:lvl9pPr marL="3657600" indent="0">
-              <a:buNone/>
-              <a:defRPr sz="1600" b="1"/>
-            </a:lvl9pPr>
-          </a:lstStyle>
-          <a:p>
-            <a:pPr lvl="0"/>
-            <a:r>
-              <a:rPr lang="en-US" smtClean="0"/>
-              <a:t>Click to edit Master text styles</a:t>
-            </a:r>
-          </a:p>
-        </p:txBody>
-      </p:sp>
-      <p:sp>
-        <p:nvSpPr>
-          <p:cNvPr id="6" name="Content Placeholder 5"/>
-          <p:cNvSpPr>
-            <a:spLocks noGrp="1"/>
-          </p:cNvSpPr>
-          <p:nvPr>
-            <p:ph sz="quarter" idx="4"/>
-          </p:nvPr>
-        </p:nvSpPr>
-        <p:spPr>
-          <a:xfrm>
-            <a:off x="6172200" y="2505075"/>
-            <a:ext cx="5183188" cy="3684588"/>
-          </a:xfrm>
-        </p:spPr>
-        <p:txBody>
-          <a:bodyPr/>
-          <a:lstStyle/>
-          <a:p>
-            <a:pPr lvl="0"/>
-            <a:r>
-              <a:rPr lang="en-US" smtClean="0"/>
-              <a:t>Click to edit Master text styles</a:t>
-            </a:r>
-          </a:p>
-          <a:p>
-            <a:pPr lvl="1"/>
-            <a:r>
-              <a:rPr lang="en-US" smtClean="0"/>
-              <a:t>Second level</a:t>
-            </a:r>
-          </a:p>
-          <a:p>
-            <a:pPr lvl="2"/>
-            <a:r>
-              <a:rPr lang="en-US" smtClean="0"/>
-              <a:t>Third level</a:t>
-            </a:r>
-          </a:p>
-          <a:p>
-            <a:pPr lvl="3"/>
-            <a:r>
-              <a:rPr lang="en-US" smtClean="0"/>
-              <a:t>Fourth level</a:t>
-            </a:r>
-          </a:p>
-          <a:p>
-            <a:pPr lvl="4"/>
-            <a:r>
-              <a:rPr lang="en-US" smtClean="0"/>
-              <a:t>Fifth level</a:t>
-            </a:r>
-            <a:endParaRPr lang="en-US"/>
-          </a:p>
-        </p:txBody>
-      </p:sp>
-      <p:sp>
-        <p:nvSpPr>
-          <p:cNvPr id="7" name="Date Placeholder 6"/>
-          <p:cNvSpPr>
-            <a:spLocks noGrp="1"/>
-          </p:cNvSpPr>
-          <p:nvPr>
-            <p:ph type="dt" sz="half" idx="10"/>
-          </p:nvPr>
-        </p:nvSpPr>
-        <p:spPr/>
-        <p:txBody>
-          <a:bodyPr/>
-          <a:lstStyle/>
-          <a:p>
-            <a:fld id="{608D1F3B-488F-7E48-86D2-E03BC21833E8}" type="datetimeFigureOut">
-              <a:rPr lang="en-US" smtClean="0"/>
-              <a:t>5/22/18</a:t>
-            </a:fld>
-            <a:endParaRPr lang="en-US"/>
-          </a:p>
-        </p:txBody>
-      </p:sp>
-      <p:sp>
-        <p:nvSpPr>
-          <p:cNvPr id="8" name="Footer Placeholder 7"/>
-          <p:cNvSpPr>
-            <a:spLocks noGrp="1"/>
-          </p:cNvSpPr>
-          <p:nvPr>
-            <p:ph type="ftr" sz="quarter" idx="11"/>
-          </p:nvPr>
-        </p:nvSpPr>
-        <p:spPr/>
-        <p:txBody>
-          <a:bodyPr/>
-          <a:lstStyle/>
-          <a:p>
-            <a:endParaRPr lang="en-US"/>
-          </a:p>
-        </p:txBody>
-      </p:sp>
-      <p:sp>
-        <p:nvSpPr>
-          <p:cNvPr id="9" name="Slide Number Placeholder 8"/>
-          <p:cNvSpPr>
-            <a:spLocks noGrp="1"/>
-          </p:cNvSpPr>
-          <p:nvPr>
-            <p:ph type="sldNum" sz="quarter" idx="12"/>
-          </p:nvPr>
-        </p:nvSpPr>
-        <p:spPr/>
-        <p:txBody>
-          <a:bodyPr/>
-          <a:lstStyle/>
-          <a:p>
-            <a:fld id="{9EA1FB67-A041-DA40-91B6-11F765EC9F75}" type="slidenum">
-              <a:rPr lang="en-US" smtClean="0"/>
-              <a:t>‹#›</a:t>
-            </a:fld>
-            <a:endParaRPr lang="en-US"/>
-          </a:p>
-        </p:txBody>
-      </p:sp>
-    </p:spTree>
-    <p:extLst>
-      <p:ext uri="{BB962C8B-B14F-4D97-AF65-F5344CB8AC3E}">
-        <p14:creationId xmlns:p14="http://schemas.microsoft.com/office/powerpoint/2010/main" val="457730131"/>
-      </p:ext>
-    </p:extLst>
-  </p:cSld>
-  <p:clrMapOvr>
-    <a:masterClrMapping/>
-  </p:clrMapOvr>
-</p:sldLayout>
-</file>
-
-<file path=ppt/slideLayouts/slideLayout6.xml><?xml version="1.0" encoding="utf-8"?>
 <p:sldLayout xmlns:a="http://schemas.openxmlformats.org/drawingml/2006/main" xmlns:r="http://schemas.openxmlformats.org/officeDocument/2006/relationships" xmlns:p="http://schemas.openxmlformats.org/presentationml/2006/main" type="titleOnly" preserve="1">
   <p:cSld name="Title Only">
     <p:spTree>
@@ -1698,7 +1002,15 @@
         <p:spPr/>
         <p:txBody>
           <a:bodyPr/>
-          <a:lstStyle/>
+          <a:lstStyle>
+            <a:lvl1pPr>
+              <a:defRPr>
+                <a:solidFill>
+                  <a:schemeClr val="bg1"/>
+                </a:solidFill>
+              </a:defRPr>
+            </a:lvl1pPr>
+          </a:lstStyle>
           <a:p>
             <a:r>
               <a:rPr lang="en-US" smtClean="0"/>
@@ -1725,7 +1037,7 @@
           <a:p>
             <a:fld id="{608D1F3B-488F-7E48-86D2-E03BC21833E8}" type="datetimeFigureOut">
               <a:rPr lang="en-US" smtClean="0"/>
-              <a:t>5/22/18</a:t>
+              <a:t>8/2/18</a:t>
             </a:fld>
             <a:endParaRPr lang="en-US"/>
           </a:p>
@@ -1786,7 +1098,7 @@
 </p:sldLayout>
 </file>
 
-<file path=ppt/slideLayouts/slideLayout7.xml><?xml version="1.0" encoding="utf-8"?>
+<file path=ppt/slideLayouts/slideLayout6.xml><?xml version="1.0" encoding="utf-8"?>
 <p:sldLayout xmlns:a="http://schemas.openxmlformats.org/drawingml/2006/main" xmlns:r="http://schemas.openxmlformats.org/officeDocument/2006/relationships" xmlns:p="http://schemas.openxmlformats.org/presentationml/2006/main" type="blank" preserve="1">
   <p:cSld name="Blank">
     <p:spTree>
@@ -1820,7 +1132,7 @@
           <a:p>
             <a:fld id="{608D1F3B-488F-7E48-86D2-E03BC21833E8}" type="datetimeFigureOut">
               <a:rPr lang="en-US" smtClean="0"/>
-              <a:t>5/22/18</a:t>
+              <a:t>8/2/18</a:t>
             </a:fld>
             <a:endParaRPr lang="en-US"/>
           </a:p>
@@ -1881,9 +1193,9 @@
 </p:sldLayout>
 </file>
 
-<file path=ppt/slideLayouts/slideLayout8.xml><?xml version="1.0" encoding="utf-8"?>
-<p:sldLayout xmlns:a="http://schemas.openxmlformats.org/drawingml/2006/main" xmlns:r="http://schemas.openxmlformats.org/officeDocument/2006/relationships" xmlns:p="http://schemas.openxmlformats.org/presentationml/2006/main" type="objTx" preserve="1">
-  <p:cSld name="Content with Caption">
+<file path=ppt/slideLayouts/slideLayout7.xml><?xml version="1.0" encoding="utf-8"?>
+<p:sldLayout xmlns:a="http://schemas.openxmlformats.org/drawingml/2006/main" xmlns:r="http://schemas.openxmlformats.org/officeDocument/2006/relationships" xmlns:p="http://schemas.openxmlformats.org/presentationml/2006/main" type="vertTx" preserve="1">
+  <p:cSld name="Title and Vertical Text">
     <p:spTree>
       <p:nvGrpSpPr>
         <p:cNvPr id="1" name=""/>
@@ -1908,17 +1220,16 @@
             <p:ph type="title"/>
           </p:nvPr>
         </p:nvSpPr>
-        <p:spPr>
-          <a:xfrm>
-            <a:off x="839788" y="457200"/>
-            <a:ext cx="3932237" cy="1600200"/>
-          </a:xfrm>
-        </p:spPr>
-        <p:txBody>
-          <a:bodyPr anchor="b"/>
+        <p:spPr/>
+        <p:txBody>
+          <a:bodyPr/>
           <a:lstStyle>
             <a:lvl1pPr>
-              <a:defRPr sz="3200"/>
+              <a:defRPr>
+                <a:solidFill>
+                  <a:schemeClr val="bg1"/>
+                </a:solidFill>
+              </a:defRPr>
             </a:lvl1pPr>
           </a:lstStyle>
           <a:p>
@@ -1932,51 +1243,18 @@
       </p:sp>
       <p:sp>
         <p:nvSpPr>
-          <p:cNvPr id="3" name="Content Placeholder 2"/>
-          <p:cNvSpPr>
-            <a:spLocks noGrp="1"/>
-          </p:cNvSpPr>
-          <p:nvPr>
-            <p:ph idx="1"/>
-          </p:nvPr>
-        </p:nvSpPr>
-        <p:spPr>
-          <a:xfrm>
-            <a:off x="5183188" y="987425"/>
-            <a:ext cx="6172200" cy="4873625"/>
-          </a:xfrm>
-        </p:spPr>
-        <p:txBody>
-          <a:bodyPr/>
-          <a:lstStyle>
-            <a:lvl1pPr>
-              <a:defRPr sz="3200"/>
-            </a:lvl1pPr>
-            <a:lvl2pPr>
-              <a:defRPr sz="2800"/>
-            </a:lvl2pPr>
-            <a:lvl3pPr>
-              <a:defRPr sz="2400"/>
-            </a:lvl3pPr>
-            <a:lvl4pPr>
-              <a:defRPr sz="2000"/>
-            </a:lvl4pPr>
-            <a:lvl5pPr>
-              <a:defRPr sz="2000"/>
-            </a:lvl5pPr>
-            <a:lvl6pPr>
-              <a:defRPr sz="2000"/>
-            </a:lvl6pPr>
-            <a:lvl7pPr>
-              <a:defRPr sz="2000"/>
-            </a:lvl7pPr>
-            <a:lvl8pPr>
-              <a:defRPr sz="2000"/>
-            </a:lvl8pPr>
-            <a:lvl9pPr>
-              <a:defRPr sz="2000"/>
-            </a:lvl9pPr>
-          </a:lstStyle>
+          <p:cNvPr id="3" name="Vertical Text Placeholder 2"/>
+          <p:cNvSpPr>
+            <a:spLocks noGrp="1"/>
+          </p:cNvSpPr>
+          <p:nvPr>
+            <p:ph type="body" orient="vert" idx="1"/>
+          </p:nvPr>
+        </p:nvSpPr>
+        <p:spPr/>
+        <p:txBody>
+          <a:bodyPr vert="eaVert"/>
+          <a:lstStyle/>
           <a:p>
             <a:pPr lvl="0"/>
             <a:r>
@@ -2017,72 +1295,7 @@
       </p:sp>
       <p:sp>
         <p:nvSpPr>
-          <p:cNvPr id="4" name="Text Placeholder 3"/>
-          <p:cNvSpPr>
-            <a:spLocks noGrp="1"/>
-          </p:cNvSpPr>
-          <p:nvPr>
-            <p:ph type="body" sz="half" idx="2"/>
-          </p:nvPr>
-        </p:nvSpPr>
-        <p:spPr>
-          <a:xfrm>
-            <a:off x="839788" y="2057400"/>
-            <a:ext cx="3932237" cy="3811588"/>
-          </a:xfrm>
-        </p:spPr>
-        <p:txBody>
-          <a:bodyPr/>
-          <a:lstStyle>
-            <a:lvl1pPr marL="0" indent="0">
-              <a:buNone/>
-              <a:defRPr sz="1600"/>
-            </a:lvl1pPr>
-            <a:lvl2pPr marL="457200" indent="0">
-              <a:buNone/>
-              <a:defRPr sz="1400"/>
-            </a:lvl2pPr>
-            <a:lvl3pPr marL="914400" indent="0">
-              <a:buNone/>
-              <a:defRPr sz="1200"/>
-            </a:lvl3pPr>
-            <a:lvl4pPr marL="1371600" indent="0">
-              <a:buNone/>
-              <a:defRPr sz="1000"/>
-            </a:lvl4pPr>
-            <a:lvl5pPr marL="1828800" indent="0">
-              <a:buNone/>
-              <a:defRPr sz="1000"/>
-            </a:lvl5pPr>
-            <a:lvl6pPr marL="2286000" indent="0">
-              <a:buNone/>
-              <a:defRPr sz="1000"/>
-            </a:lvl6pPr>
-            <a:lvl7pPr marL="2743200" indent="0">
-              <a:buNone/>
-              <a:defRPr sz="1000"/>
-            </a:lvl7pPr>
-            <a:lvl8pPr marL="3200400" indent="0">
-              <a:buNone/>
-              <a:defRPr sz="1000"/>
-            </a:lvl8pPr>
-            <a:lvl9pPr marL="3657600" indent="0">
-              <a:buNone/>
-              <a:defRPr sz="1000"/>
-            </a:lvl9pPr>
-          </a:lstStyle>
-          <a:p>
-            <a:pPr lvl="0"/>
-            <a:r>
-              <a:rPr lang="en-US" smtClean="0"/>
-              <a:t>Click to edit Master text styles</a:t>
-            </a:r>
-          </a:p>
-        </p:txBody>
-      </p:sp>
-      <p:sp>
-        <p:nvSpPr>
-          <p:cNvPr id="5" name="Date Placeholder 4"/>
+          <p:cNvPr id="4" name="Date Placeholder 3"/>
           <p:cNvSpPr>
             <a:spLocks noGrp="1"/>
           </p:cNvSpPr>
@@ -2097,7 +1310,7 @@
           <a:p>
             <a:fld id="{608D1F3B-488F-7E48-86D2-E03BC21833E8}" type="datetimeFigureOut">
               <a:rPr lang="en-US" smtClean="0"/>
-              <a:t>5/22/18</a:t>
+              <a:t>8/2/18</a:t>
             </a:fld>
             <a:endParaRPr lang="en-US"/>
           </a:p>
@@ -2105,7 +1318,7 @@
       </p:sp>
       <p:sp>
         <p:nvSpPr>
-          <p:cNvPr id="6" name="Footer Placeholder 5"/>
+          <p:cNvPr id="5" name="Footer Placeholder 4"/>
           <p:cNvSpPr>
             <a:spLocks noGrp="1"/>
           </p:cNvSpPr>
@@ -2124,7 +1337,7 @@
       </p:sp>
       <p:sp>
         <p:nvSpPr>
-          <p:cNvPr id="7" name="Slide Number Placeholder 6"/>
+          <p:cNvPr id="6" name="Slide Number Placeholder 5"/>
           <p:cNvSpPr>
             <a:spLocks noGrp="1"/>
           </p:cNvSpPr>
@@ -2148,260 +1361,7 @@
     </p:spTree>
     <p:extLst>
       <p:ext uri="{BB962C8B-B14F-4D97-AF65-F5344CB8AC3E}">
-        <p14:creationId xmlns:p14="http://schemas.microsoft.com/office/powerpoint/2010/main" val="241870582"/>
-      </p:ext>
-    </p:extLst>
-  </p:cSld>
-  <p:clrMapOvr>
-    <a:masterClrMapping/>
-  </p:clrMapOvr>
-</p:sldLayout>
-</file>
-
-<file path=ppt/slideLayouts/slideLayout9.xml><?xml version="1.0" encoding="utf-8"?>
-<p:sldLayout xmlns:a="http://schemas.openxmlformats.org/drawingml/2006/main" xmlns:r="http://schemas.openxmlformats.org/officeDocument/2006/relationships" xmlns:p="http://schemas.openxmlformats.org/presentationml/2006/main" type="picTx" preserve="1">
-  <p:cSld name="Picture with Caption">
-    <p:spTree>
-      <p:nvGrpSpPr>
-        <p:cNvPr id="1" name=""/>
-        <p:cNvGrpSpPr/>
-        <p:nvPr/>
-      </p:nvGrpSpPr>
-      <p:grpSpPr>
-        <a:xfrm>
-          <a:off x="0" y="0"/>
-          <a:ext cx="0" cy="0"/>
-          <a:chOff x="0" y="0"/>
-          <a:chExt cx="0" cy="0"/>
-        </a:xfrm>
-      </p:grpSpPr>
-      <p:sp>
-        <p:nvSpPr>
-          <p:cNvPr id="2" name="Title 1"/>
-          <p:cNvSpPr>
-            <a:spLocks noGrp="1"/>
-          </p:cNvSpPr>
-          <p:nvPr>
-            <p:ph type="title"/>
-          </p:nvPr>
-        </p:nvSpPr>
-        <p:spPr>
-          <a:xfrm>
-            <a:off x="839788" y="457200"/>
-            <a:ext cx="3932237" cy="1600200"/>
-          </a:xfrm>
-        </p:spPr>
-        <p:txBody>
-          <a:bodyPr anchor="b"/>
-          <a:lstStyle>
-            <a:lvl1pPr>
-              <a:defRPr sz="3200"/>
-            </a:lvl1pPr>
-          </a:lstStyle>
-          <a:p>
-            <a:r>
-              <a:rPr lang="en-US" smtClean="0"/>
-              <a:t>Click to edit Master title style</a:t>
-            </a:r>
-            <a:endParaRPr lang="en-US"/>
-          </a:p>
-        </p:txBody>
-      </p:sp>
-      <p:sp>
-        <p:nvSpPr>
-          <p:cNvPr id="3" name="Picture Placeholder 2"/>
-          <p:cNvSpPr>
-            <a:spLocks noGrp="1"/>
-          </p:cNvSpPr>
-          <p:nvPr>
-            <p:ph type="pic" idx="1"/>
-          </p:nvPr>
-        </p:nvSpPr>
-        <p:spPr>
-          <a:xfrm>
-            <a:off x="5183188" y="987425"/>
-            <a:ext cx="6172200" cy="4873625"/>
-          </a:xfrm>
-        </p:spPr>
-        <p:txBody>
-          <a:bodyPr/>
-          <a:lstStyle>
-            <a:lvl1pPr marL="0" indent="0">
-              <a:buNone/>
-              <a:defRPr sz="3200"/>
-            </a:lvl1pPr>
-            <a:lvl2pPr marL="457200" indent="0">
-              <a:buNone/>
-              <a:defRPr sz="2800"/>
-            </a:lvl2pPr>
-            <a:lvl3pPr marL="914400" indent="0">
-              <a:buNone/>
-              <a:defRPr sz="2400"/>
-            </a:lvl3pPr>
-            <a:lvl4pPr marL="1371600" indent="0">
-              <a:buNone/>
-              <a:defRPr sz="2000"/>
-            </a:lvl4pPr>
-            <a:lvl5pPr marL="1828800" indent="0">
-              <a:buNone/>
-              <a:defRPr sz="2000"/>
-            </a:lvl5pPr>
-            <a:lvl6pPr marL="2286000" indent="0">
-              <a:buNone/>
-              <a:defRPr sz="2000"/>
-            </a:lvl6pPr>
-            <a:lvl7pPr marL="2743200" indent="0">
-              <a:buNone/>
-              <a:defRPr sz="2000"/>
-            </a:lvl7pPr>
-            <a:lvl8pPr marL="3200400" indent="0">
-              <a:buNone/>
-              <a:defRPr sz="2000"/>
-            </a:lvl8pPr>
-            <a:lvl9pPr marL="3657600" indent="0">
-              <a:buNone/>
-              <a:defRPr sz="2000"/>
-            </a:lvl9pPr>
-          </a:lstStyle>
-          <a:p>
-            <a:endParaRPr lang="en-US"/>
-          </a:p>
-        </p:txBody>
-      </p:sp>
-      <p:sp>
-        <p:nvSpPr>
-          <p:cNvPr id="4" name="Text Placeholder 3"/>
-          <p:cNvSpPr>
-            <a:spLocks noGrp="1"/>
-          </p:cNvSpPr>
-          <p:nvPr>
-            <p:ph type="body" sz="half" idx="2"/>
-          </p:nvPr>
-        </p:nvSpPr>
-        <p:spPr>
-          <a:xfrm>
-            <a:off x="839788" y="2057400"/>
-            <a:ext cx="3932237" cy="3811588"/>
-          </a:xfrm>
-        </p:spPr>
-        <p:txBody>
-          <a:bodyPr/>
-          <a:lstStyle>
-            <a:lvl1pPr marL="0" indent="0">
-              <a:buNone/>
-              <a:defRPr sz="1600"/>
-            </a:lvl1pPr>
-            <a:lvl2pPr marL="457200" indent="0">
-              <a:buNone/>
-              <a:defRPr sz="1400"/>
-            </a:lvl2pPr>
-            <a:lvl3pPr marL="914400" indent="0">
-              <a:buNone/>
-              <a:defRPr sz="1200"/>
-            </a:lvl3pPr>
-            <a:lvl4pPr marL="1371600" indent="0">
-              <a:buNone/>
-              <a:defRPr sz="1000"/>
-            </a:lvl4pPr>
-            <a:lvl5pPr marL="1828800" indent="0">
-              <a:buNone/>
-              <a:defRPr sz="1000"/>
-            </a:lvl5pPr>
-            <a:lvl6pPr marL="2286000" indent="0">
-              <a:buNone/>
-              <a:defRPr sz="1000"/>
-            </a:lvl6pPr>
-            <a:lvl7pPr marL="2743200" indent="0">
-              <a:buNone/>
-              <a:defRPr sz="1000"/>
-            </a:lvl7pPr>
-            <a:lvl8pPr marL="3200400" indent="0">
-              <a:buNone/>
-              <a:defRPr sz="1000"/>
-            </a:lvl8pPr>
-            <a:lvl9pPr marL="3657600" indent="0">
-              <a:buNone/>
-              <a:defRPr sz="1000"/>
-            </a:lvl9pPr>
-          </a:lstStyle>
-          <a:p>
-            <a:pPr lvl="0"/>
-            <a:r>
-              <a:rPr lang="en-US" smtClean="0"/>
-              <a:t>Click to edit Master text styles</a:t>
-            </a:r>
-          </a:p>
-        </p:txBody>
-      </p:sp>
-      <p:sp>
-        <p:nvSpPr>
-          <p:cNvPr id="5" name="Date Placeholder 4"/>
-          <p:cNvSpPr>
-            <a:spLocks noGrp="1"/>
-          </p:cNvSpPr>
-          <p:nvPr>
-            <p:ph type="dt" sz="half" idx="10"/>
-          </p:nvPr>
-        </p:nvSpPr>
-        <p:spPr/>
-        <p:txBody>
-          <a:bodyPr/>
-          <a:lstStyle/>
-          <a:p>
-            <a:fld id="{608D1F3B-488F-7E48-86D2-E03BC21833E8}" type="datetimeFigureOut">
-              <a:rPr lang="en-US" smtClean="0"/>
-              <a:t>5/22/18</a:t>
-            </a:fld>
-            <a:endParaRPr lang="en-US"/>
-          </a:p>
-        </p:txBody>
-      </p:sp>
-      <p:sp>
-        <p:nvSpPr>
-          <p:cNvPr id="6" name="Footer Placeholder 5"/>
-          <p:cNvSpPr>
-            <a:spLocks noGrp="1"/>
-          </p:cNvSpPr>
-          <p:nvPr>
-            <p:ph type="ftr" sz="quarter" idx="11"/>
-          </p:nvPr>
-        </p:nvSpPr>
-        <p:spPr/>
-        <p:txBody>
-          <a:bodyPr/>
-          <a:lstStyle/>
-          <a:p>
-            <a:endParaRPr lang="en-US"/>
-          </a:p>
-        </p:txBody>
-      </p:sp>
-      <p:sp>
-        <p:nvSpPr>
-          <p:cNvPr id="7" name="Slide Number Placeholder 6"/>
-          <p:cNvSpPr>
-            <a:spLocks noGrp="1"/>
-          </p:cNvSpPr>
-          <p:nvPr>
-            <p:ph type="sldNum" sz="quarter" idx="12"/>
-          </p:nvPr>
-        </p:nvSpPr>
-        <p:spPr/>
-        <p:txBody>
-          <a:bodyPr/>
-          <a:lstStyle/>
-          <a:p>
-            <a:fld id="{9EA1FB67-A041-DA40-91B6-11F765EC9F75}" type="slidenum">
-              <a:rPr lang="en-US" smtClean="0"/>
-              <a:t>‹#›</a:t>
-            </a:fld>
-            <a:endParaRPr lang="en-US"/>
-          </a:p>
-        </p:txBody>
-      </p:sp>
-    </p:spTree>
-    <p:extLst>
-      <p:ext uri="{BB962C8B-B14F-4D97-AF65-F5344CB8AC3E}">
-        <p14:creationId xmlns:p14="http://schemas.microsoft.com/office/powerpoint/2010/main" val="2079811550"/>
+        <p14:creationId xmlns:p14="http://schemas.microsoft.com/office/powerpoint/2010/main" val="801398631"/>
       </p:ext>
     </p:extLst>
   </p:cSld>
@@ -2534,7 +1494,7 @@
             <a:fld id="{608D1F3B-488F-7E48-86D2-E03BC21833E8}" type="datetimeFigureOut">
               <a:rPr lang="en-US" smtClean="0"/>
               <a:pPr/>
-              <a:t>5/22/18</a:t>
+              <a:t>8/2/18</a:t>
             </a:fld>
             <a:endParaRPr lang="en-US"/>
           </a:p>
@@ -2717,13 +1677,9 @@
     <p:sldLayoutId id="2147483650" r:id="rId2"/>
     <p:sldLayoutId id="2147483651" r:id="rId3"/>
     <p:sldLayoutId id="2147483652" r:id="rId4"/>
-    <p:sldLayoutId id="2147483653" r:id="rId5"/>
-    <p:sldLayoutId id="2147483654" r:id="rId6"/>
-    <p:sldLayoutId id="2147483655" r:id="rId7"/>
-    <p:sldLayoutId id="2147483656" r:id="rId8"/>
-    <p:sldLayoutId id="2147483657" r:id="rId9"/>
-    <p:sldLayoutId id="2147483658" r:id="rId10"/>
-    <p:sldLayoutId id="2147483659" r:id="rId11"/>
+    <p:sldLayoutId id="2147483654" r:id="rId5"/>
+    <p:sldLayoutId id="2147483655" r:id="rId6"/>
+    <p:sldLayoutId id="2147483658" r:id="rId7"/>
   </p:sldLayoutIdLst>
   <p:txStyles>
     <p:titleStyle>
